--- a/slides/PVadmin.pptx
+++ b/slides/PVadmin.pptx
@@ -1971,7 +1971,7 @@
               <a:pPr>
                 <a:defRPr/>
               </a:pPr>
-              <a:t>28-08-2025</a:t>
+              <a:t>07-09-2025</a:t>
             </a:fld>
             <a:endParaRPr lang="nl-NL"/>
           </a:p>
@@ -2174,7 +2174,7 @@
               <a:pPr>
                 <a:defRPr/>
               </a:pPr>
-              <a:t>28-08-2025</a:t>
+              <a:t>07-09-2025</a:t>
             </a:fld>
             <a:endParaRPr lang="nl-NL"/>
           </a:p>
@@ -2374,7 +2374,7 @@
               <a:pPr>
                 <a:defRPr/>
               </a:pPr>
-              <a:t>28-08-2025</a:t>
+              <a:t>07-09-2025</a:t>
             </a:fld>
             <a:endParaRPr lang="nl-NL"/>
           </a:p>
@@ -2620,7 +2620,7 @@
               <a:pPr>
                 <a:defRPr/>
               </a:pPr>
-              <a:t>28-08-2025</a:t>
+              <a:t>07-09-2025</a:t>
             </a:fld>
             <a:endParaRPr lang="nl-NL"/>
           </a:p>
@@ -2969,7 +2969,7 @@
               <a:pPr>
                 <a:defRPr/>
               </a:pPr>
-              <a:t>28-08-2025</a:t>
+              <a:t>07-09-2025</a:t>
             </a:fld>
             <a:endParaRPr lang="nl-NL"/>
           </a:p>
@@ -3462,7 +3462,7 @@
               <a:pPr>
                 <a:defRPr/>
               </a:pPr>
-              <a:t>28-08-2025</a:t>
+              <a:t>07-09-2025</a:t>
             </a:fld>
             <a:endParaRPr lang="nl-NL"/>
           </a:p>
@@ -3894,7 +3894,7 @@
               <a:pPr>
                 <a:defRPr/>
               </a:pPr>
-              <a:t>28-08-2025</a:t>
+              <a:t>07-09-2025</a:t>
             </a:fld>
             <a:endParaRPr lang="nl-NL"/>
           </a:p>
@@ -4043,7 +4043,7 @@
               <a:pPr>
                 <a:defRPr/>
               </a:pPr>
-              <a:t>28-08-2025</a:t>
+              <a:t>07-09-2025</a:t>
             </a:fld>
             <a:endParaRPr lang="nl-NL"/>
           </a:p>
@@ -4186,7 +4186,7 @@
               <a:pPr>
                 <a:defRPr/>
               </a:pPr>
-              <a:t>28-08-2025</a:t>
+              <a:t>07-09-2025</a:t>
             </a:fld>
             <a:endParaRPr lang="nl-NL"/>
           </a:p>
@@ -4730,7 +4730,7 @@
               <a:pPr>
                 <a:defRPr/>
               </a:pPr>
-              <a:t>28-08-2025</a:t>
+              <a:t>07-09-2025</a:t>
             </a:fld>
             <a:endParaRPr lang="nl-NL"/>
           </a:p>
@@ -5260,7 +5260,7 @@
               <a:pPr>
                 <a:defRPr/>
               </a:pPr>
-              <a:t>28-08-2025</a:t>
+              <a:t>07-09-2025</a:t>
             </a:fld>
             <a:endParaRPr lang="nl-NL"/>
           </a:p>
@@ -5632,7 +5632,7 @@
               <a:pPr>
                 <a:defRPr/>
               </a:pPr>
-              <a:t>28-08-2025</a:t>
+              <a:t>07-09-2025</a:t>
             </a:fld>
             <a:endParaRPr lang="nl-NL"/>
           </a:p>
@@ -6689,7 +6689,7 @@
                 <a:cs typeface="Calibri" pitchFamily="34" charset="0"/>
                 <a:sym typeface="Wingdings" pitchFamily="2" charset="2"/>
               </a:rPr>
-              <a:t>You can work in a team, up to size 3.</a:t>
+              <a:t>For project: you can work in a team, up to size 3.</a:t>
             </a:r>
           </a:p>
           <a:p>
@@ -7147,7 +7147,7 @@
           <p:nvPr>
             <p:extLst>
               <p:ext uri="{D42A27DB-BD31-4B8C-83A1-F6EECF244321}">
-                <p14:modId xmlns:p14="http://schemas.microsoft.com/office/powerpoint/2010/main" val="3278671548"/>
+                <p14:modId xmlns:p14="http://schemas.microsoft.com/office/powerpoint/2010/main" val="1565055586"/>
               </p:ext>
             </p:extLst>
           </p:nvPr>
@@ -7457,8 +7457,27 @@
                     <a:bodyPr/>
                     <a:lstStyle/>
                     <a:p>
-                      <a:pPr algn="ctr"/>
-                      <a:endParaRPr lang="en-US" sz="1600" dirty="0"/>
+                      <a:pPr marL="0" marR="0" lvl="0" indent="0" algn="ctr" defTabSz="914400" rtl="0" eaLnBrk="1" fontAlgn="auto" latinLnBrk="0" hangingPunct="1">
+                        <a:lnSpc>
+                          <a:spcPct val="100000"/>
+                        </a:lnSpc>
+                        <a:spcBef>
+                          <a:spcPts val="0"/>
+                        </a:spcBef>
+                        <a:spcAft>
+                          <a:spcPts val="0"/>
+                        </a:spcAft>
+                        <a:buClrTx/>
+                        <a:buSzTx/>
+                        <a:buFontTx/>
+                        <a:buNone/>
+                        <a:tabLst/>
+                        <a:defRPr/>
+                      </a:pPr>
+                      <a:r>
+                        <a:rPr lang="en-US" sz="1600" dirty="0"/>
+                        <a:t>✔</a:t>
+                      </a:r>
                     </a:p>
                   </a:txBody>
                   <a:tcPr/>
@@ -8320,21 +8339,13 @@
           <a:bodyPr/>
           <a:lstStyle/>
           <a:p>
-            <a:pPr eaLnBrk="1" hangingPunct="1"/>
             <a:r>
               <a:rPr lang="en-US" dirty="0">
-                <a:solidFill>
-                  <a:schemeClr val="accent2"/>
-                </a:solidFill>
                 <a:hlinkClick r:id="rId3"/>
               </a:rPr>
-              <a:t>www.cs.uu.nl/docs/vakken/pv</a:t>
-            </a:r>
-            <a:endParaRPr lang="en-US" dirty="0">
-              <a:solidFill>
-                <a:schemeClr val="accent2"/>
-              </a:solidFill>
-            </a:endParaRPr>
+              <a:t>https://wooshrow.github.io/infopv/</a:t>
+            </a:r>
+            <a:endParaRPr lang="en-US" dirty="0"/>
           </a:p>
           <a:p>
             <a:pPr marL="0" indent="0">
